--- a/docs/pptx/Ch10_SUPPLEMENT.pptx
+++ b/docs/pptx/Ch10_SUPPLEMENT.pptx
@@ -504,10 +504,18 @@
           <a:lstStyle/>
           <a:p>
             <a:r>
-              <a:rPr lang="en-US" dirty="0"/>
-              <a:t/>
-            </a:r>
-            <a:endParaRPr lang="en-US" dirty="0"/>
+              <a:t>PROF: Exercice guidé — ajouter des exceptions à un projet existant.</a:t>
+            </a:r>
+          </a:p>
+          <a:p>
+            <a:r>
+              <a:t>1) Identifier les cas d'erreur 2) Créer une exception custom 3) Ajouter try-catch 4) Écrire les tests JUnit.</a:t>
+            </a:r>
+          </a:p>
+          <a:p>
+            <a:r>
+              <a:t>Durée : 45 min.</a:t>
+            </a:r>
           </a:p>
         </p:txBody>
       </p:sp>
@@ -592,10 +600,18 @@
           <a:lstStyle/>
           <a:p>
             <a:r>
-              <a:rPr lang="en-US" dirty="0"/>
-              <a:t/>
-            </a:r>
-            <a:endParaRPr lang="en-US" dirty="0"/>
+              <a:t>PROF: Questions sur le pattern AAA (Arrange-Act-Assert).</a:t>
+            </a:r>
+          </a:p>
+          <a:p>
+            <a:r>
+              <a:t>Demander d'identifier les 3 phases dans un test donné.</a:t>
+            </a:r>
+          </a:p>
+          <a:p>
+            <a:r>
+              <a:t>Piège : test qui fait Act avant Arrange.</a:t>
+            </a:r>
           </a:p>
         </p:txBody>
       </p:sp>
@@ -680,10 +696,13 @@
           <a:lstStyle/>
           <a:p>
             <a:r>
-              <a:rPr lang="en-US" dirty="0"/>
-              <a:t/>
-            </a:r>
-            <a:endParaRPr lang="en-US" dirty="0"/>
+              <a:t>PROF: Récap throw/throws/try-catch.</a:t>
+            </a:r>
+          </a:p>
+          <a:p>
+            <a:r>
+              <a:t>Exercice flash : donner 5 lignes de code, identifier laquelle lance, laquelle déclare, laquelle attrape.</a:t>
+            </a:r>
           </a:p>
         </p:txBody>
       </p:sp>
@@ -768,10 +787,18 @@
           <a:lstStyle/>
           <a:p>
             <a:r>
-              <a:rPr lang="en-US" dirty="0"/>
-              <a:t/>
-            </a:r>
-            <a:endParaRPr lang="en-US" dirty="0"/>
+              <a:t>PROF: Exception personnalisée — montrer StockInsuffisantException.</a:t>
+            </a:r>
+          </a:p>
+          <a:p>
+            <a:r>
+              <a:t>Expliquer quand créer ses propres exceptions vs utiliser les standards.</a:t>
+            </a:r>
+          </a:p>
+          <a:p>
+            <a:r>
+              <a:t>Règle : exception custom si le message standard n'est pas assez explicite.</a:t>
+            </a:r>
           </a:p>
         </p:txBody>
       </p:sp>
